--- a/proposals/clover-gakuen/proposal_IRR.pptx
+++ b/proposals/clover-gakuen/proposal_IRR.pptx
@@ -1830,7 +1830,7 @@
                 <a:ea typeface="Yu Gothic" pitchFamily="34" charset="-122"/>
                 <a:cs typeface="Yu Gothic" pitchFamily="34" charset="-120"/>
               </a:rPr>
-              <a:t>千葉県 令和8年度 補助金を活用｜太陽光 ＋ 蓄電池 ＋ 窓ガラスコーティング</a:t>
+              <a:t>千葉県 令和8年度 補助金を活用｜太陽光 ＋ 蓄電池 ＋ 窓ガラスコーティング ＋ 空調</a:t>
             </a:r>
             <a:endParaRPr lang="en-US" sz="1500" dirty="0"/>
           </a:p>
@@ -2097,7 +2097,7 @@
                 <a:ea typeface="Yu Gothic" pitchFamily="34" charset="-122"/>
                 <a:cs typeface="Yu Gothic" pitchFamily="34" charset="-120"/>
               </a:rPr>
-              <a:t>補助金 982万円 は今年度限り（交付決定前の着工は対象外）</a:t>
+              <a:t>補助金 満額1,000万円 は今年度限り（交付決定前の着工は対象外）</a:t>
             </a:r>
             <a:endParaRPr lang="en-US" sz="1500" dirty="0"/>
           </a:p>
@@ -2195,7 +2195,7 @@
                 <a:ea typeface="Yu Gothic" pitchFamily="34" charset="-122"/>
                 <a:cs typeface="Yu Gothic" pitchFamily="34" charset="-120"/>
               </a:rPr>
-              <a:t>太陽光は IRR 14.4%・約8年回収、自費でもしっかり回る</a:t>
+              <a:t>太陽光は 特別値引480万円 → IRR 26.4%・5年回収</a:t>
             </a:r>
             <a:endParaRPr lang="en-US" sz="1500" dirty="0"/>
           </a:p>
@@ -2293,7 +2293,7 @@
                 <a:ea typeface="Yu Gothic" pitchFamily="34" charset="-122"/>
                 <a:cs typeface="Yu Gothic" pitchFamily="34" charset="-120"/>
               </a:rPr>
-              <a:t>蓄電池＋窓コートは 実質半額 で、施設を災害から守る</a:t>
+              <a:t>蓄電池＋窓コート＋空調は ほぼ半額 で、施設を災害から守る</a:t>
             </a:r>
             <a:endParaRPr lang="en-US" sz="1500" dirty="0"/>
           </a:p>
@@ -2391,7 +2391,7 @@
                 <a:ea typeface="Yu Gothic" pitchFamily="34" charset="-122"/>
                 <a:cs typeface="Yu Gothic" pitchFamily="34" charset="-120"/>
               </a:rPr>
-              <a:t>電気代削減・資産形成・利用者様の安全をひとつに</a:t>
+              <a:t>CO2削減3t/年の要件も 窓2t＋空調1t でクリア</a:t>
             </a:r>
             <a:endParaRPr lang="en-US" sz="1500" dirty="0"/>
           </a:p>
@@ -2992,7 +2992,7 @@
                 <a:ea typeface="Yu Gothic" pitchFamily="34" charset="-122"/>
                 <a:cs typeface="Yu Gothic" pitchFamily="34" charset="-120"/>
               </a:rPr>
-              <a:t>3つの柱 ＜ 2施設で補助金活用 ＞</a:t>
+              <a:t>3つの柱＋空調更新 ＜ 2施設で補助金活用 ＞</a:t>
             </a:r>
             <a:endParaRPr lang="en-US" sz="3000" dirty="0"/>
           </a:p>
@@ -3006,12 +3006,12 @@
         </p:nvSpPr>
         <p:spPr>
           <a:xfrm>
-            <a:off x="731520" y="1783080"/>
-            <a:ext cx="2377440" cy="2468880"/>
+            <a:off x="731520" y="1737360"/>
+            <a:ext cx="2377440" cy="2286000"/>
           </a:xfrm>
           <a:prstGeom prst="roundRect">
             <a:avLst>
-              <a:gd name="adj" fmla="val 3077"/>
+              <a:gd name="adj" fmla="val 3200"/>
             </a:avLst>
           </a:prstGeom>
           <a:solidFill>
@@ -3040,7 +3040,7 @@
         </p:nvSpPr>
         <p:spPr>
           <a:xfrm>
-            <a:off x="1737360" y="2011680"/>
+            <a:off x="1737360" y="1938528"/>
             <a:ext cx="365760" cy="365760"/>
           </a:xfrm>
           <a:prstGeom prst="ellipse">
@@ -3060,7 +3060,7 @@
         </p:nvSpPr>
         <p:spPr>
           <a:xfrm>
-            <a:off x="1737360" y="2011680"/>
+            <a:off x="1737360" y="1938528"/>
             <a:ext cx="365760" cy="365760"/>
           </a:xfrm>
           <a:prstGeom prst="rect">
@@ -3099,7 +3099,7 @@
         </p:nvSpPr>
         <p:spPr>
           <a:xfrm>
-            <a:off x="822960" y="2560320"/>
+            <a:off x="822960" y="2432304"/>
             <a:ext cx="2194560" cy="457200"/>
           </a:xfrm>
           <a:prstGeom prst="rect">
@@ -3138,7 +3138,7 @@
         </p:nvSpPr>
         <p:spPr>
           <a:xfrm>
-            <a:off x="822960" y="3017520"/>
+            <a:off x="822960" y="2889504"/>
             <a:ext cx="2194560" cy="548640"/>
           </a:xfrm>
           <a:prstGeom prst="rect">
@@ -3177,7 +3177,7 @@
         </p:nvSpPr>
         <p:spPr>
           <a:xfrm>
-            <a:off x="822960" y="3703320"/>
+            <a:off x="822960" y="3520440"/>
             <a:ext cx="2194560" cy="365760"/>
           </a:xfrm>
           <a:prstGeom prst="rect">
@@ -3216,12 +3216,12 @@
         </p:nvSpPr>
         <p:spPr>
           <a:xfrm>
-            <a:off x="3337560" y="1783080"/>
-            <a:ext cx="2377440" cy="2468880"/>
+            <a:off x="3337560" y="1737360"/>
+            <a:ext cx="2377440" cy="2286000"/>
           </a:xfrm>
           <a:prstGeom prst="roundRect">
             <a:avLst>
-              <a:gd name="adj" fmla="val 3077"/>
+              <a:gd name="adj" fmla="val 3200"/>
             </a:avLst>
           </a:prstGeom>
           <a:solidFill>
@@ -3250,7 +3250,7 @@
         </p:nvSpPr>
         <p:spPr>
           <a:xfrm>
-            <a:off x="4343400" y="2011680"/>
+            <a:off x="4343400" y="1938528"/>
             <a:ext cx="365760" cy="365760"/>
           </a:xfrm>
           <a:prstGeom prst="ellipse">
@@ -3270,7 +3270,7 @@
         </p:nvSpPr>
         <p:spPr>
           <a:xfrm>
-            <a:off x="4343400" y="2011680"/>
+            <a:off x="4343400" y="1938528"/>
             <a:ext cx="365760" cy="365760"/>
           </a:xfrm>
           <a:prstGeom prst="rect">
@@ -3309,7 +3309,7 @@
         </p:nvSpPr>
         <p:spPr>
           <a:xfrm>
-            <a:off x="3429000" y="2560320"/>
+            <a:off x="3429000" y="2432304"/>
             <a:ext cx="2194560" cy="457200"/>
           </a:xfrm>
           <a:prstGeom prst="rect">
@@ -3348,7 +3348,7 @@
         </p:nvSpPr>
         <p:spPr>
           <a:xfrm>
-            <a:off x="3429000" y="3017520"/>
+            <a:off x="3429000" y="2889504"/>
             <a:ext cx="2194560" cy="548640"/>
           </a:xfrm>
           <a:prstGeom prst="rect">
@@ -3387,7 +3387,7 @@
         </p:nvSpPr>
         <p:spPr>
           <a:xfrm>
-            <a:off x="3429000" y="3703320"/>
+            <a:off x="3429000" y="3520440"/>
             <a:ext cx="2194560" cy="365760"/>
           </a:xfrm>
           <a:prstGeom prst="rect">
@@ -3426,12 +3426,12 @@
         </p:nvSpPr>
         <p:spPr>
           <a:xfrm>
-            <a:off x="5943600" y="1783080"/>
-            <a:ext cx="2377440" cy="2468880"/>
+            <a:off x="5943600" y="1737360"/>
+            <a:ext cx="2377440" cy="2286000"/>
           </a:xfrm>
           <a:prstGeom prst="roundRect">
             <a:avLst>
-              <a:gd name="adj" fmla="val 3077"/>
+              <a:gd name="adj" fmla="val 3200"/>
             </a:avLst>
           </a:prstGeom>
           <a:solidFill>
@@ -3460,7 +3460,7 @@
         </p:nvSpPr>
         <p:spPr>
           <a:xfrm>
-            <a:off x="6949440" y="2011680"/>
+            <a:off x="6949440" y="1938528"/>
             <a:ext cx="365760" cy="365760"/>
           </a:xfrm>
           <a:prstGeom prst="ellipse">
@@ -3480,7 +3480,7 @@
         </p:nvSpPr>
         <p:spPr>
           <a:xfrm>
-            <a:off x="6949440" y="2011680"/>
+            <a:off x="6949440" y="1938528"/>
             <a:ext cx="365760" cy="365760"/>
           </a:xfrm>
           <a:prstGeom prst="rect">
@@ -3519,7 +3519,7 @@
         </p:nvSpPr>
         <p:spPr>
           <a:xfrm>
-            <a:off x="6035040" y="2560320"/>
+            <a:off x="6035040" y="2432304"/>
             <a:ext cx="2194560" cy="457200"/>
           </a:xfrm>
           <a:prstGeom prst="rect">
@@ -3558,7 +3558,7 @@
         </p:nvSpPr>
         <p:spPr>
           <a:xfrm>
-            <a:off x="6035040" y="3017520"/>
+            <a:off x="6035040" y="2889504"/>
             <a:ext cx="2194560" cy="548640"/>
           </a:xfrm>
           <a:prstGeom prst="rect">
@@ -3597,7 +3597,7 @@
         </p:nvSpPr>
         <p:spPr>
           <a:xfrm>
-            <a:off x="6035040" y="3703320"/>
+            <a:off x="6035040" y="3520440"/>
             <a:ext cx="2194560" cy="365760"/>
           </a:xfrm>
           <a:prstGeom prst="rect">
@@ -3625,6 +3625,45 @@
               <a:t>クローバー学園</a:t>
             </a:r>
             <a:endParaRPr lang="en-US" sz="1100" dirty="0"/>
+          </a:p>
+        </p:txBody>
+      </p:sp>
+      <p:sp>
+        <p:nvSpPr>
+          <p:cNvPr id="23" name="Text 21"/>
+          <p:cNvSpPr/>
+          <p:nvPr/>
+        </p:nvSpPr>
+        <p:spPr>
+          <a:xfrm>
+            <a:off x="731520" y="4251960"/>
+            <a:ext cx="7680960" cy="365760"/>
+          </a:xfrm>
+          <a:prstGeom prst="rect">
+            <a:avLst/>
+          </a:prstGeom>
+          <a:noFill/>
+          <a:ln/>
+        </p:spPr>
+        <p:txBody>
+          <a:bodyPr wrap="square" lIns="0" tIns="0" rIns="0" bIns="0" rtlCol="0" anchor="ctr"/>
+          <a:lstStyle/>
+          <a:p>
+            <a:pPr algn="ctr" indent="0" marL="0">
+              <a:buNone/>
+            </a:pPr>
+            <a:r>
+              <a:rPr lang="en-US" sz="1300" b="1" dirty="0">
+                <a:solidFill>
+                  <a:srgbClr val="15324A"/>
+                </a:solidFill>
+                <a:latin typeface="Yu Gothic" pitchFamily="34" charset="0"/>
+                <a:ea typeface="Yu Gothic" pitchFamily="34" charset="-122"/>
+                <a:cs typeface="Yu Gothic" pitchFamily="34" charset="-120"/>
+              </a:rPr>
+              <a:t>＋ 空調1台を高効率機へ更新（第2クローバー学園・CO2要件達成用）</a:t>
+            </a:r>
+            <a:endParaRPr lang="en-US" sz="1300" dirty="0"/>
           </a:p>
         </p:txBody>
       </p:sp>
@@ -4310,7 +4349,7 @@
                 <a:ea typeface="Yu Gothic" pitchFamily="34" charset="-122"/>
                 <a:cs typeface="Yu Gothic" pitchFamily="34" charset="-120"/>
               </a:rPr>
-              <a:t>夏の暑さをやわらげ空調負荷を低減</a:t>
+              <a:t>空調光熱費▲25%・全体▲12%（予測）</a:t>
             </a:r>
             <a:endParaRPr lang="en-US" sz="1450" dirty="0"/>
           </a:p>
@@ -4349,7 +4388,7 @@
                 <a:ea typeface="Yu Gothic" pitchFamily="34" charset="-122"/>
                 <a:cs typeface="Yu Gothic" pitchFamily="34" charset="-120"/>
               </a:rPr>
-              <a:t>補助対象経費に算入。空調電力の削減で、ランニングコストも継続的に圧縮します。</a:t>
+              <a:t>補助対象経費に算入。補助金活用で投資回収は通常5年以内（CO2削減 2t/年）。</a:t>
             </a:r>
             <a:endParaRPr lang="en-US" sz="1300" dirty="0"/>
           </a:p>
@@ -4479,7 +4518,7 @@
                 <a:ea typeface="Yu Gothic" pitchFamily="34" charset="-122"/>
                 <a:cs typeface="Yu Gothic" pitchFamily="34" charset="-120"/>
               </a:rPr>
-              <a:t>つくった電気を、ほぼ全量その場で使う</a:t>
+              <a:t>特別値引 480万円で、さらに導入しやすく</a:t>
             </a:r>
             <a:endParaRPr lang="en-US" sz="3000" dirty="0"/>
           </a:p>
@@ -4634,7 +4673,7 @@
                 <a:ea typeface="Yu Gothic" pitchFamily="34" charset="-122"/>
                 <a:cs typeface="Yu Gothic" pitchFamily="34" charset="-120"/>
               </a:rPr>
-              <a:t>施設の消費電力が発電量を大きく上回る</a:t>
+              <a:t>つくった電気はほぼ全量を自家消費（自家消費率95%）</a:t>
             </a:r>
             <a:endParaRPr lang="en-US" sz="1500" dirty="0"/>
           </a:p>
@@ -4655,7 +4694,7 @@
                 <a:ea typeface="Yu Gothic" pitchFamily="34" charset="-122"/>
                 <a:cs typeface="Yu Gothic" pitchFamily="34" charset="-120"/>
               </a:rPr>
-              <a:t>つくった電気はほぼ全量を自家消費（自家消費率95%）</a:t>
+              <a:t>特別値引 ▲480万円 適用（950万→470万・税別）</a:t>
             </a:r>
             <a:endParaRPr lang="en-US" sz="1500" dirty="0"/>
           </a:p>
@@ -4767,7 +4806,7 @@
                 <a:ea typeface="Yu Gothic" pitchFamily="34" charset="-122"/>
                 <a:cs typeface="Yu Gothic" pitchFamily="34" charset="-120"/>
               </a:rPr>
-              <a:t>投資対効果 ① 太陽光（自費）</a:t>
+              <a:t>投資対効果 ① 太陽光（自費・値引後）</a:t>
             </a:r>
             <a:endParaRPr lang="en-US" sz="1200" dirty="0"/>
           </a:p>
@@ -4806,7 +4845,7 @@
                 <a:ea typeface="Yu Gothic" pitchFamily="34" charset="-122"/>
                 <a:cs typeface="Yu Gothic" pitchFamily="34" charset="-120"/>
               </a:rPr>
-              <a:t>自費でも、しっかり利益を生む投資</a:t>
+              <a:t>実質約502万円が、5年で回収</a:t>
             </a:r>
             <a:endParaRPr lang="en-US" sz="3000" dirty="0"/>
           </a:p>
@@ -4918,7 +4957,7 @@
                 <a:ea typeface="Yu Gothic" pitchFamily="34" charset="-122"/>
                 <a:cs typeface="Yu Gothic" pitchFamily="34" charset="-120"/>
               </a:rPr>
-              <a:t>14.4%</a:t>
+              <a:t>26.4%</a:t>
             </a:r>
             <a:endParaRPr lang="en-US" sz="8000" dirty="0"/>
           </a:p>
@@ -5142,7 +5181,7 @@
                 <a:ea typeface="Yu Gothic" pitchFamily="34" charset="-122"/>
                 <a:cs typeface="Yu Gothic" pitchFamily="34" charset="-120"/>
               </a:rPr>
-              <a:t>約 8 年</a:t>
+              <a:t>約 5 年</a:t>
             </a:r>
             <a:endParaRPr lang="en-US" sz="1900" dirty="0"/>
           </a:p>
@@ -5254,7 +5293,7 @@
                 <a:ea typeface="Yu Gothic" pitchFamily="34" charset="-122"/>
                 <a:cs typeface="Yu Gothic" pitchFamily="34" charset="-120"/>
               </a:rPr>
-              <a:t>＋約 2,288 万円</a:t>
+              <a:t>＋約 2,706 万円</a:t>
             </a:r>
             <a:endParaRPr lang="en-US" sz="1900" dirty="0"/>
           </a:p>
@@ -5268,8 +5307,8 @@
         </p:nvSpPr>
         <p:spPr>
           <a:xfrm>
-            <a:off x="457200" y="4736592"/>
-            <a:ext cx="8229600" cy="310896"/>
+            <a:off x="457200" y="4700016"/>
+            <a:ext cx="8229600" cy="384048"/>
           </a:xfrm>
           <a:prstGeom prst="rect">
             <a:avLst/>
@@ -5285,7 +5324,7 @@
               <a:buNone/>
             </a:pPr>
             <a:r>
-              <a:rPr lang="en-US" sz="850" dirty="0">
+              <a:rPr lang="en-US" sz="800" dirty="0">
                 <a:solidFill>
                   <a:srgbClr val="5B7184"/>
                 </a:solidFill>
@@ -5293,9 +5332,9 @@
                 <a:ea typeface="Yu Gothic" pitchFamily="34" charset="-122"/>
                 <a:cs typeface="Yu Gothic" pitchFamily="34" charset="-120"/>
               </a:rPr>
-              <a:t>前提：太陽光40.48kW／年間発電46,552kWh（1,150kWh/kW・NEDO平均年データ準拠）／自家消費率95%／電力単価27円/kWh／電気代上昇3%/年／20年。投資は税込・自費額。IRRは前提に基づく試算で採択を保証しません。</a:t>
-            </a:r>
-            <a:endParaRPr lang="en-US" sz="850" dirty="0"/>
+              <a:t>前提：太陽光40.48kW／年間発電46,552kWh（1,150kWh/kW・NEDO平均年）／自家消費率95%／単価27円/kWh／上昇3%/年／20年。投資は特別値引▲480万後の自費・税込502.5万円。IRRは試算であり採択を保証しません。※窓ガラスコーティング未施工の場合、太陽光値引は100万円減額。</a:t>
+            </a:r>
+            <a:endParaRPr lang="en-US" sz="800" dirty="0"/>
           </a:p>
         </p:txBody>
       </p:sp>
@@ -5384,7 +5423,7 @@
                 <a:ea typeface="Yu Gothic" pitchFamily="34" charset="-122"/>
                 <a:cs typeface="Yu Gothic" pitchFamily="34" charset="-120"/>
               </a:rPr>
-              <a:t>投資対効果 ② 補助金で実質半額</a:t>
+              <a:t>投資対効果 ② 補助金 満額1,000万円</a:t>
             </a:r>
             <a:endParaRPr lang="en-US" sz="1200" dirty="0"/>
           </a:p>
@@ -5423,7 +5462,7 @@
                 <a:ea typeface="Yu Gothic" pitchFamily="34" charset="-122"/>
                 <a:cs typeface="Yu Gothic" pitchFamily="34" charset="-120"/>
               </a:rPr>
-              <a:t>蓄電池＋窓コートが、実質半額</a:t>
+              <a:t>蓄電池＋窓コート＋空調が、ほぼ半額</a:t>
             </a:r>
             <a:endParaRPr lang="en-US" sz="3000" dirty="0"/>
           </a:p>
@@ -5535,7 +5574,7 @@
                 <a:ea typeface="Yu Gothic" pitchFamily="34" charset="-122"/>
                 <a:cs typeface="Yu Gothic" pitchFamily="34" charset="-120"/>
               </a:rPr>
-              <a:t>2,160万</a:t>
+              <a:t>2,226万</a:t>
             </a:r>
             <a:endParaRPr lang="en-US" sz="3000" dirty="0"/>
           </a:p>
@@ -5647,7 +5686,7 @@
                 <a:ea typeface="Yu Gothic" pitchFamily="34" charset="-122"/>
                 <a:cs typeface="Yu Gothic" pitchFamily="34" charset="-120"/>
               </a:rPr>
-              <a:t>補助金</a:t>
+              <a:t>補助金（満額）</a:t>
             </a:r>
             <a:endParaRPr lang="en-US" sz="1200" dirty="0"/>
           </a:p>
@@ -5686,7 +5725,7 @@
                 <a:ea typeface="Yu Gothic" pitchFamily="34" charset="-122"/>
                 <a:cs typeface="Yu Gothic" pitchFamily="34" charset="-120"/>
               </a:rPr>
-              <a:t>982万</a:t>
+              <a:t>1,000万</a:t>
             </a:r>
             <a:endParaRPr lang="en-US" sz="3000" dirty="0"/>
           </a:p>
@@ -5837,7 +5876,7 @@
                 <a:ea typeface="Yu Gothic" pitchFamily="34" charset="-122"/>
                 <a:cs typeface="Yu Gothic" pitchFamily="34" charset="-120"/>
               </a:rPr>
-              <a:t>1,178万</a:t>
+              <a:t>1,226万</a:t>
             </a:r>
             <a:endParaRPr lang="en-US" sz="3000" dirty="0"/>
           </a:p>
@@ -5876,7 +5915,7 @@
                 <a:ea typeface="Yu Gothic" pitchFamily="34" charset="-122"/>
                 <a:cs typeface="Yu Gothic" pitchFamily="34" charset="-120"/>
               </a:rPr>
-              <a:t>停電時のBCP（事業継続）と基本料金（デマンド）削減を、実質半額で手に入れられます。</a:t>
+              <a:t>停電時のBCPとデマンド削減をほぼ半額で。CO2削減も 窓2t＋空調1t＝3t/年で要件クリア。</a:t>
             </a:r>
             <a:endParaRPr lang="en-US" sz="1400" dirty="0"/>
           </a:p>
@@ -6118,7 +6157,7 @@
                 <a:ea typeface="Yu Gothic" pitchFamily="34" charset="-122"/>
                 <a:cs typeface="Yu Gothic" pitchFamily="34" charset="-120"/>
               </a:rPr>
-              <a:t>7.1%</a:t>
+              <a:t>9.5%</a:t>
             </a:r>
             <a:endParaRPr lang="en-US" sz="8000" dirty="0"/>
           </a:p>
@@ -6230,7 +6269,7 @@
                 <a:ea typeface="Yu Gothic" pitchFamily="34" charset="-122"/>
                 <a:cs typeface="Yu Gothic" pitchFamily="34" charset="-120"/>
               </a:rPr>
-              <a:t>2,099 万円</a:t>
+              <a:t>1,728 万円</a:t>
             </a:r>
             <a:endParaRPr lang="en-US" sz="1900" dirty="0"/>
           </a:p>
@@ -6342,7 +6381,7 @@
                 <a:ea typeface="Yu Gothic" pitchFamily="34" charset="-122"/>
                 <a:cs typeface="Yu Gothic" pitchFamily="34" charset="-120"/>
               </a:rPr>
-              <a:t>約 12 年</a:t>
+              <a:t>約 10 年</a:t>
             </a:r>
             <a:endParaRPr lang="en-US" sz="1900" dirty="0"/>
           </a:p>
@@ -6454,7 +6493,7 @@
                 <a:ea typeface="Yu Gothic" pitchFamily="34" charset="-122"/>
                 <a:cs typeface="Yu Gothic" pitchFamily="34" charset="-120"/>
               </a:rPr>
-              <a:t>＋約 2,185 万円</a:t>
+              <a:t>＋約 2,555 万円</a:t>
             </a:r>
             <a:endParaRPr lang="en-US" sz="1900" dirty="0"/>
           </a:p>
@@ -6468,8 +6507,8 @@
         </p:nvSpPr>
         <p:spPr>
           <a:xfrm>
-            <a:off x="457200" y="4736592"/>
-            <a:ext cx="8229600" cy="310896"/>
+            <a:off x="457200" y="4700016"/>
+            <a:ext cx="8229600" cy="384048"/>
           </a:xfrm>
           <a:prstGeom prst="rect">
             <a:avLst/>
@@ -6485,7 +6524,7 @@
               <a:buNone/>
             </a:pPr>
             <a:r>
-              <a:rPr lang="en-US" sz="850" dirty="0">
+              <a:rPr lang="en-US" sz="800" dirty="0">
                 <a:solidFill>
                   <a:srgbClr val="5B7184"/>
                 </a:solidFill>
@@ -6493,9 +6532,9 @@
                 <a:ea typeface="Yu Gothic" pitchFamily="34" charset="-122"/>
                 <a:cs typeface="Yu Gothic" pitchFamily="34" charset="-120"/>
               </a:rPr>
-              <a:t>全体＝太陽光（自費）＋蓄電池・窓コート（補助金控除後の実質負担）。蓄電池の更新費・BCPの事業継続価値は試算外（プラス要因）。IRRは前提に基づく試算で、補助金の採択・交付や将来の電気料金を保証するものではありません。</a:t>
-            </a:r>
-            <a:endParaRPr lang="en-US" sz="850" dirty="0"/>
+              <a:t>全体＝太陽光（値引後自費502.5万）＋蓄電池・窓コート・空調（補助金満額1,000万控除後の実質1,225.7万）＝税込1,728.2万。蓄電池の更新費・BCP価値は試算外（プラス要因）。IRRは前提に基づく試算で、採択・交付や将来の電気料金を保証するものではありません。</a:t>
+            </a:r>
+            <a:endParaRPr lang="en-US" sz="800" dirty="0"/>
           </a:p>
         </p:txBody>
       </p:sp>
